--- a/Foundation_F1/F1-L09_Handwriting_Dictation.pptx
+++ b/Foundation_F1/F1-L09_Handwriting_Dictation.pptx
@@ -622,7 +622,11 @@
           <a:lstStyle/>
           <a:p>
             <a:r>
-              <a:rPr lang="en-US" dirty="0"/>
+              <a:rPr lang="ar-SA" dirty="0">
+                <a:latin typeface="Amiri" pitchFamily="2" charset="-78"/>
+                <a:ea typeface="Amiri" pitchFamily="2" charset="-78"/>
+                <a:cs typeface="Amiri" pitchFamily="2" charset="-78"/>
+              </a:rPr>
               <a:t>WRITE ROUTINE + REPAIR CODES (website Part 2). Memory line: Look or listen → Say it → Picture it → Write it → Check it.
 Model → cover → write → compare (website): look at بَيْتٌ for 3 seconds; say baytun and notice يْ; cover and write; reveal, circle the FIRST mismatch and add ONE code; correct and reproduce from memory.
 Website warning: copying with the model always visible trains the hand but not recall — the COVER step is essential.</a:t>
@@ -891,7 +895,11 @@
           <a:lstStyle/>
           <a:p>
             <a:r>
-              <a:rPr lang="en-US" dirty="0"/>
+              <a:rPr lang="ar-SA" dirty="0">
+                <a:latin typeface="Amiri" pitchFamily="2" charset="-78"/>
+                <a:ea typeface="Amiri" pitchFamily="2" charset="-78"/>
+                <a:cs typeface="Amiri" pitchFamily="2" charset="-78"/>
+              </a:rPr>
               <a:t>I DO — REPAIR LINES (5 min), website Part 3. Model each line on the pen tablet with a think-aloud:
 “بَابٌ: bāʾ joins to alif; alif STOPS, so the last bāʾ stands alone.” “وَلَدٌ: wāw does not join on; lām joins to final dāl.” “جَدِيدٌ: both dāls make stops.”
 Efficient habit (website): write the legible base-and-joins first, then add dots and marks in one consistent pass.
@@ -1071,7 +1079,11 @@
           <a:lstStyle/>
           <a:p>
             <a:r>
-              <a:rPr lang="en-US" dirty="0"/>
+              <a:rPr lang="ar-SA" dirty="0">
+                <a:latin typeface="Amiri" pitchFamily="2" charset="-78"/>
+                <a:ea typeface="Amiri" pitchFamily="2" charset="-78"/>
+                <a:cs typeface="Amiri" pitchFamily="2" charset="-78"/>
+              </a:rPr>
               <a:t>Reveal. For each wrong option, ask: which repair code? (e.g. بَيتٌ → M, missing sukūn; حَدِيدٌ → D, missing dot).</a:t>
             </a:r>
             <a:endParaRPr lang="en-US" dirty="0"/>
@@ -1335,7 +1347,11 @@
           <a:lstStyle/>
           <a:p>
             <a:r>
-              <a:rPr lang="en-US" dirty="0"/>
+              <a:rPr lang="ar-SA" dirty="0">
+                <a:latin typeface="Amiri" pitchFamily="2" charset="-78"/>
+                <a:ea typeface="Amiri" pitchFamily="2" charset="-78"/>
+                <a:cs typeface="Amiri" pitchFamily="2" charset="-78"/>
+              </a:rPr>
               <a:t>DICTATION (10 min) — the website script. HIDE this slide while dictating (show the previous slide or a blank). Read each word TWICE at a measured pace, including the final -un; allow a brief HOLD after the second reading. Do not spell aloud or show the Arabic.
 Script: بَابٌ. كِتَابٌ. قَلَمٌ. مَدْرَسَةٌ. بَيْتٌ. / مُعَلِّمٌ. طَالِبٌ. يَدٌ. عَيْنٌ. كَلِمَةٌ. / ثَلَاثَةٌ. سَبْعَةٌ. وَلَدٌ. بِنْتٌ. جَدِيدٌ.
 After EACH round (website): reveal the round, count exact words /5, count repair codes by category, practise the most common repair once, re-dictate one repaired word.
@@ -1427,7 +1443,11 @@
           <a:lstStyle/>
           <a:p>
             <a:r>
-              <a:rPr lang="en-US" dirty="0"/>
+              <a:rPr lang="ar-SA" dirty="0">
+                <a:latin typeface="Amiri" pitchFamily="2" charset="-78"/>
+                <a:ea typeface="Amiri" pitchFamily="2" charset="-78"/>
+                <a:cs typeface="Amiri" pitchFamily="2" charset="-78"/>
+              </a:rPr>
               <a:t>SPEAKING REHEARSAL (3 min) — website speaking prompts (the Core prompt is teacher-made). No breakout rooms (saves setup time).
 Sequence: ● 10s think → ↔ 45s everyone rehearses their answer aloud with mic muted → ◎ pairs on open mic: name two students (warned in advance); A asks, B answers; the rest of the class types one follow-up question in chat (+ / ?) → ↺ one student summarises the answer they heard.
 Routes: Core uses the Core prompt and stem; Develop the Develop prompts; Stretch the last prompt.
@@ -1522,7 +1542,11 @@
           <a:lstStyle/>
           <a:p>
             <a:r>
-              <a:rPr lang="en-US" dirty="0"/>
+              <a:rPr lang="ar-SA" dirty="0">
+                <a:latin typeface="Amiri" pitchFamily="2" charset="-78"/>
+                <a:ea typeface="Amiri" pitchFamily="2" charset="-78"/>
+                <a:cs typeface="Amiri" pitchFamily="2" charset="-78"/>
+              </a:rPr>
               <a:t>WELCOME (1 min) — while students join.
 • Greet each student by name as they arrive: السَّلَامُ عَلَيْكُمْ. Take the register (Pastoral Tracker: attendance 0/1).
 • 2-MINUTE CHECK-IN (SEND training): a private chat to any student who seemed unsettled last lesson — “Are you okay today? 👍 / 👎”.
@@ -2599,7 +2623,11 @@
           <a:lstStyle/>
           <a:p>
             <a:r>
-              <a:rPr lang="en-US" dirty="0"/>
+              <a:rPr lang="ar-SA" dirty="0">
+                <a:latin typeface="Amiri" pitchFamily="2" charset="-78"/>
+                <a:ea typeface="Amiri" pitchFamily="2" charset="-78"/>
+                <a:cs typeface="Amiri" pitchFamily="2" charset="-78"/>
+              </a:rPr>
               <a:t>KEY WORDS — HOW TO TEACH EACH GROUP (EAL pre-teaching routine, 7 min)
 1. HEAR IT: say the word twice, clearly, with a gesture where possible.
 2. SAY IT: choral repetition — “I say, you say” — then two volunteers.
@@ -2694,7 +2722,11 @@
           <a:lstStyle/>
           <a:p>
             <a:r>
-              <a:rPr lang="en-US" dirty="0"/>
+              <a:rPr lang="ar-SA" dirty="0">
+                <a:latin typeface="Amiri" pitchFamily="2" charset="-78"/>
+                <a:ea typeface="Amiri" pitchFamily="2" charset="-78"/>
+                <a:cs typeface="Amiri" pitchFamily="2" charset="-78"/>
+              </a:rPr>
               <a:t>FIVE FEATURES (website Part 1): Direction · Shape · Dots · Joins · Marks — and a stable baseline with space below for letters such as final ي ج ع.
 Training text vs ordinary Arabic (website): today’s words are fully marked because the task checks diacritic placement; everyday Arabic (مدرسة جديدة) omits most marks — do not call that misspelled.
 Legibility before speed: a faster sample with lost dots or broken joins is not more fluent.</a:t>
@@ -3180,6 +3212,7 @@
                   <a:srgbClr val="D4AF37"/>
                 </a:solidFill>
                 <a:latin typeface="Amiri" pitchFamily="2" charset="-78"/>
+                <a:ea typeface="Amiri" pitchFamily="2" charset="-78"/>
                 <a:cs typeface="Amiri" pitchFamily="2" charset="-78"/>
               </a:rPr>
               <a:t>م</a:t>
@@ -3386,6 +3419,7 @@
                   <a:srgbClr val="D4AF37"/>
                 </a:solidFill>
                 <a:latin typeface="Amiri" pitchFamily="2" charset="-78"/>
+                <a:ea typeface="Amiri" pitchFamily="2" charset="-78"/>
                 <a:cs typeface="Amiri" pitchFamily="2" charset="-78"/>
               </a:rPr>
               <a:t>التَّدْرِيبُ عَلَى الكِتَابَةِ — الدِّقَّةُ وَالطَّلَاقَةُ</a:t>
@@ -3843,6 +3877,7 @@
                   <a:srgbClr val="D4AF37"/>
                 </a:solidFill>
                 <a:latin typeface="Amiri" pitchFamily="2" charset="-78"/>
+                <a:ea typeface="Amiri" pitchFamily="2" charset="-78"/>
                 <a:cs typeface="Amiri" pitchFamily="2" charset="-78"/>
               </a:rPr>
               <a:t>م</a:t>
@@ -4163,6 +4198,7 @@
                   <a:srgbClr val="8A6D1E"/>
                 </a:solidFill>
                 <a:latin typeface="Amiri" pitchFamily="2" charset="-78"/>
+                <a:ea typeface="Amiri" pitchFamily="2" charset="-78"/>
                 <a:cs typeface="Amiri" pitchFamily="2" charset="-78"/>
               </a:rPr>
               <a:t>خُطُوَاتُ الكِتَابَةِ</a:t>
@@ -5731,6 +5767,7 @@
                   <a:srgbClr val="D4AF37"/>
                 </a:solidFill>
                 <a:latin typeface="Amiri" pitchFamily="2" charset="-78"/>
+                <a:ea typeface="Amiri" pitchFamily="2" charset="-78"/>
                 <a:cs typeface="Amiri" pitchFamily="2" charset="-78"/>
               </a:rPr>
               <a:t>م</a:t>
@@ -6051,6 +6088,7 @@
                   <a:srgbClr val="8A6D1E"/>
                 </a:solidFill>
                 <a:latin typeface="Amiri" pitchFamily="2" charset="-78"/>
+                <a:ea typeface="Amiri" pitchFamily="2" charset="-78"/>
                 <a:cs typeface="Amiri" pitchFamily="2" charset="-78"/>
               </a:rPr>
               <a:t>فَحْصٌ سَرِيعٌ</a:t>
@@ -6675,6 +6713,7 @@
                   <a:srgbClr val="1B3B6F"/>
                 </a:solidFill>
                 <a:latin typeface="Amiri" pitchFamily="2" charset="-78"/>
+                <a:ea typeface="Amiri" pitchFamily="2" charset="-78"/>
                 <a:cs typeface="Amiri" pitchFamily="2" charset="-78"/>
               </a:rPr>
               <a:t>بَابٌ</a:t>
@@ -6903,6 +6942,7 @@
                   <a:srgbClr val="1F2A37"/>
                 </a:solidFill>
                 <a:latin typeface="Amiri" pitchFamily="2" charset="-78"/>
+                <a:ea typeface="Amiri" pitchFamily="2" charset="-78"/>
                 <a:cs typeface="Amiri" pitchFamily="2" charset="-78"/>
               </a:rPr>
               <a:t>ب</a:t>
@@ -7590,6 +7630,7 @@
                   <a:srgbClr val="1B3B6F"/>
                 </a:solidFill>
                 <a:latin typeface="Amiri" pitchFamily="2" charset="-78"/>
+                <a:ea typeface="Amiri" pitchFamily="2" charset="-78"/>
                 <a:cs typeface="Amiri" pitchFamily="2" charset="-78"/>
               </a:rPr>
               <a:t>مدرسة</a:t>
@@ -7938,6 +7979,7 @@
                   <a:srgbClr val="D4AF37"/>
                 </a:solidFill>
                 <a:latin typeface="Amiri" pitchFamily="2" charset="-78"/>
+                <a:ea typeface="Amiri" pitchFamily="2" charset="-78"/>
                 <a:cs typeface="Amiri" pitchFamily="2" charset="-78"/>
               </a:rPr>
               <a:t>م</a:t>
@@ -8258,6 +8300,7 @@
                   <a:srgbClr val="8A6D1E"/>
                 </a:solidFill>
                 <a:latin typeface="Amiri" pitchFamily="2" charset="-78"/>
+                <a:ea typeface="Amiri" pitchFamily="2" charset="-78"/>
                 <a:cs typeface="Amiri" pitchFamily="2" charset="-78"/>
               </a:rPr>
               <a:t>الإِجَابَاتُ وَالتَّعْلِيلُ</a:t>
@@ -8947,6 +8990,7 @@
                   <a:srgbClr val="1B3B6F"/>
                 </a:solidFill>
                 <a:latin typeface="Amiri" pitchFamily="2" charset="-78"/>
+                <a:ea typeface="Amiri" pitchFamily="2" charset="-78"/>
                 <a:cs typeface="Amiri" pitchFamily="2" charset="-78"/>
               </a:rPr>
               <a:t>بَابٌ</a:t>
@@ -9202,6 +9246,7 @@
                   <a:srgbClr val="9AA1AB"/>
                 </a:solidFill>
                 <a:latin typeface="Amiri" pitchFamily="2" charset="-78"/>
+                <a:ea typeface="Amiri" pitchFamily="2" charset="-78"/>
                 <a:cs typeface="Amiri" pitchFamily="2" charset="-78"/>
               </a:rPr>
               <a:t>ب</a:t>
@@ -9992,6 +10037,7 @@
                   <a:srgbClr val="1B3B6F"/>
                 </a:solidFill>
                 <a:latin typeface="Amiri" pitchFamily="2" charset="-78"/>
+                <a:ea typeface="Amiri" pitchFamily="2" charset="-78"/>
                 <a:cs typeface="Amiri" pitchFamily="2" charset="-78"/>
               </a:rPr>
               <a:t>مدرسة</a:t>
@@ -10405,6 +10451,7 @@
                   <a:srgbClr val="D4AF37"/>
                 </a:solidFill>
                 <a:latin typeface="Amiri" pitchFamily="2" charset="-78"/>
+                <a:ea typeface="Amiri" pitchFamily="2" charset="-78"/>
                 <a:cs typeface="Amiri" pitchFamily="2" charset="-78"/>
               </a:rPr>
               <a:t>م</a:t>
@@ -10725,6 +10772,7 @@
                   <a:srgbClr val="8A6D1E"/>
                 </a:solidFill>
                 <a:latin typeface="Amiri" pitchFamily="2" charset="-78"/>
+                <a:ea typeface="Amiri" pitchFamily="2" charset="-78"/>
                 <a:cs typeface="Amiri" pitchFamily="2" charset="-78"/>
               </a:rPr>
               <a:t>أَصْلِحِ الحَرْفَ بِدِقَّةٍ</a:t>
@@ -11005,6 +11053,7 @@
                   <a:srgbClr val="1B3B6F"/>
                 </a:solidFill>
                 <a:latin typeface="Amiri" pitchFamily="2" charset="-78"/>
+                <a:ea typeface="Amiri" pitchFamily="2" charset="-78"/>
                 <a:cs typeface="Amiri" pitchFamily="2" charset="-78"/>
               </a:rPr>
               <a:t>بَابٌ · وَلَدٌ · جَدِيدٌ</a:t>
@@ -11211,6 +11260,7 @@
                   <a:srgbClr val="1B3B6F"/>
                 </a:solidFill>
                 <a:latin typeface="Amiri" pitchFamily="2" charset="-78"/>
+                <a:ea typeface="Amiri" pitchFamily="2" charset="-78"/>
                 <a:cs typeface="Amiri" pitchFamily="2" charset="-78"/>
               </a:rPr>
               <a:t>بَيْتٌ · مُعَلِّمٌ · عَيْنٌ</a:t>
@@ -11417,6 +11467,7 @@
                   <a:srgbClr val="1B3B6F"/>
                 </a:solidFill>
                 <a:latin typeface="Amiri" pitchFamily="2" charset="-78"/>
+                <a:ea typeface="Amiri" pitchFamily="2" charset="-78"/>
                 <a:cs typeface="Amiri" pitchFamily="2" charset="-78"/>
               </a:rPr>
               <a:t>قَلَمٌ جَدِيدٌ</a:t>
@@ -11623,6 +11674,7 @@
                   <a:srgbClr val="1B3B6F"/>
                 </a:solidFill>
                 <a:latin typeface="Amiri" pitchFamily="2" charset="-78"/>
+                <a:ea typeface="Amiri" pitchFamily="2" charset="-78"/>
                 <a:cs typeface="Amiri" pitchFamily="2" charset="-78"/>
               </a:rPr>
               <a:t>ب ت ث ن ي · ج ح خ · ع غ · ف ق</a:t>
@@ -11794,6 +11846,7 @@
                   <a:srgbClr val="D4AF37"/>
                 </a:solidFill>
                 <a:latin typeface="Amiri" pitchFamily="2" charset="-78"/>
+                <a:ea typeface="Amiri" pitchFamily="2" charset="-78"/>
                 <a:cs typeface="Amiri" pitchFamily="2" charset="-78"/>
               </a:rPr>
               <a:t>م</a:t>
@@ -12114,6 +12167,7 @@
                   <a:srgbClr val="8A6D1E"/>
                 </a:solidFill>
                 <a:latin typeface="Amiri" pitchFamily="2" charset="-78"/>
+                <a:ea typeface="Amiri" pitchFamily="2" charset="-78"/>
                 <a:cs typeface="Amiri" pitchFamily="2" charset="-78"/>
               </a:rPr>
               <a:t>اِخْتَرِ الشَّكْلَ الصَّحِيحَ</a:t>
@@ -12388,6 +12442,7 @@
                   <a:srgbClr val="1F2A37"/>
                 </a:solidFill>
                 <a:latin typeface="Amiri" pitchFamily="2" charset="-78"/>
+                <a:ea typeface="Amiri" pitchFamily="2" charset="-78"/>
                 <a:cs typeface="Amiri" pitchFamily="2" charset="-78"/>
               </a:rPr>
               <a:t>بَيتٌ</a:t>
@@ -12489,6 +12544,7 @@
                   <a:srgbClr val="1F2A37"/>
                 </a:solidFill>
                 <a:latin typeface="Amiri" pitchFamily="2" charset="-78"/>
+                <a:ea typeface="Amiri" pitchFamily="2" charset="-78"/>
                 <a:cs typeface="Amiri" pitchFamily="2" charset="-78"/>
               </a:rPr>
               <a:t>بَنْتٌ</a:t>
@@ -12590,6 +12646,7 @@
                   <a:srgbClr val="1F2A37"/>
                 </a:solidFill>
                 <a:latin typeface="Amiri" pitchFamily="2" charset="-78"/>
+                <a:ea typeface="Amiri" pitchFamily="2" charset="-78"/>
                 <a:cs typeface="Amiri" pitchFamily="2" charset="-78"/>
               </a:rPr>
               <a:t>بَيْتٌ</a:t>
@@ -12826,6 +12883,7 @@
                   <a:srgbClr val="1F2A37"/>
                 </a:solidFill>
                 <a:latin typeface="Amiri" pitchFamily="2" charset="-78"/>
+                <a:ea typeface="Amiri" pitchFamily="2" charset="-78"/>
                 <a:cs typeface="Amiri" pitchFamily="2" charset="-78"/>
               </a:rPr>
               <a:t>مُعَلِّمٌ</a:t>
@@ -12927,6 +12985,7 @@
                   <a:srgbClr val="1F2A37"/>
                 </a:solidFill>
                 <a:latin typeface="Amiri" pitchFamily="2" charset="-78"/>
+                <a:ea typeface="Amiri" pitchFamily="2" charset="-78"/>
                 <a:cs typeface="Amiri" pitchFamily="2" charset="-78"/>
               </a:rPr>
               <a:t>مُعَلِمٌ</a:t>
@@ -13028,6 +13087,7 @@
                   <a:srgbClr val="1F2A37"/>
                 </a:solidFill>
                 <a:latin typeface="Amiri" pitchFamily="2" charset="-78"/>
+                <a:ea typeface="Amiri" pitchFamily="2" charset="-78"/>
                 <a:cs typeface="Amiri" pitchFamily="2" charset="-78"/>
               </a:rPr>
               <a:t>مَعَلِّمٌ</a:t>
@@ -13264,6 +13324,7 @@
                   <a:srgbClr val="1F2A37"/>
                 </a:solidFill>
                 <a:latin typeface="Amiri" pitchFamily="2" charset="-78"/>
+                <a:ea typeface="Amiri" pitchFamily="2" charset="-78"/>
                 <a:cs typeface="Amiri" pitchFamily="2" charset="-78"/>
               </a:rPr>
               <a:t>كِتَبٌ</a:t>
@@ -13365,6 +13426,7 @@
                   <a:srgbClr val="1F2A37"/>
                 </a:solidFill>
                 <a:latin typeface="Amiri" pitchFamily="2" charset="-78"/>
+                <a:ea typeface="Amiri" pitchFamily="2" charset="-78"/>
                 <a:cs typeface="Amiri" pitchFamily="2" charset="-78"/>
               </a:rPr>
               <a:t>كِتَابٌ</a:t>
@@ -13466,6 +13528,7 @@
                   <a:srgbClr val="1F2A37"/>
                 </a:solidFill>
                 <a:latin typeface="Amiri" pitchFamily="2" charset="-78"/>
+                <a:ea typeface="Amiri" pitchFamily="2" charset="-78"/>
                 <a:cs typeface="Amiri" pitchFamily="2" charset="-78"/>
               </a:rPr>
               <a:t>كُتَابٌ</a:t>
@@ -13702,6 +13765,7 @@
                   <a:srgbClr val="1F2A37"/>
                 </a:solidFill>
                 <a:latin typeface="Amiri" pitchFamily="2" charset="-78"/>
+                <a:ea typeface="Amiri" pitchFamily="2" charset="-78"/>
                 <a:cs typeface="Amiri" pitchFamily="2" charset="-78"/>
               </a:rPr>
               <a:t>بِنْتٌ</a:t>
@@ -13803,6 +13867,7 @@
                   <a:srgbClr val="1F2A37"/>
                 </a:solidFill>
                 <a:latin typeface="Amiri" pitchFamily="2" charset="-78"/>
+                <a:ea typeface="Amiri" pitchFamily="2" charset="-78"/>
                 <a:cs typeface="Amiri" pitchFamily="2" charset="-78"/>
               </a:rPr>
               <a:t>بَيْتٌ</a:t>
@@ -13904,6 +13969,7 @@
                   <a:srgbClr val="1F2A37"/>
                 </a:solidFill>
                 <a:latin typeface="Amiri" pitchFamily="2" charset="-78"/>
+                <a:ea typeface="Amiri" pitchFamily="2" charset="-78"/>
                 <a:cs typeface="Amiri" pitchFamily="2" charset="-78"/>
               </a:rPr>
               <a:t>بِتْنٌ</a:t>
@@ -14140,6 +14206,7 @@
                   <a:srgbClr val="1F2A37"/>
                 </a:solidFill>
                 <a:latin typeface="Amiri" pitchFamily="2" charset="-78"/>
+                <a:ea typeface="Amiri" pitchFamily="2" charset="-78"/>
                 <a:cs typeface="Amiri" pitchFamily="2" charset="-78"/>
               </a:rPr>
               <a:t>جَدِدٌ</a:t>
@@ -14241,6 +14308,7 @@
                   <a:srgbClr val="1F2A37"/>
                 </a:solidFill>
                 <a:latin typeface="Amiri" pitchFamily="2" charset="-78"/>
+                <a:ea typeface="Amiri" pitchFamily="2" charset="-78"/>
                 <a:cs typeface="Amiri" pitchFamily="2" charset="-78"/>
               </a:rPr>
               <a:t>حَدِيدٌ</a:t>
@@ -14342,6 +14410,7 @@
                   <a:srgbClr val="1F2A37"/>
                 </a:solidFill>
                 <a:latin typeface="Amiri" pitchFamily="2" charset="-78"/>
+                <a:ea typeface="Amiri" pitchFamily="2" charset="-78"/>
                 <a:cs typeface="Amiri" pitchFamily="2" charset="-78"/>
               </a:rPr>
               <a:t>جَدِيدٌ</a:t>
@@ -14644,6 +14713,7 @@
                   <a:srgbClr val="D4AF37"/>
                 </a:solidFill>
                 <a:latin typeface="Amiri" pitchFamily="2" charset="-78"/>
+                <a:ea typeface="Amiri" pitchFamily="2" charset="-78"/>
                 <a:cs typeface="Amiri" pitchFamily="2" charset="-78"/>
               </a:rPr>
               <a:t>م</a:t>
@@ -14964,6 +15034,7 @@
                   <a:srgbClr val="8A6D1E"/>
                 </a:solidFill>
                 <a:latin typeface="Amiri" pitchFamily="2" charset="-78"/>
+                <a:ea typeface="Amiri" pitchFamily="2" charset="-78"/>
                 <a:cs typeface="Amiri" pitchFamily="2" charset="-78"/>
               </a:rPr>
               <a:t>الإِجَابَاتُ</a:t>
@@ -15238,6 +15309,7 @@
                   <a:srgbClr val="9AA1AB"/>
                 </a:solidFill>
                 <a:latin typeface="Amiri" pitchFamily="2" charset="-78"/>
+                <a:ea typeface="Amiri" pitchFamily="2" charset="-78"/>
                 <a:cs typeface="Amiri" pitchFamily="2" charset="-78"/>
               </a:rPr>
               <a:t>بَيتٌ</a:t>
@@ -15339,6 +15411,7 @@
                   <a:srgbClr val="9AA1AB"/>
                 </a:solidFill>
                 <a:latin typeface="Amiri" pitchFamily="2" charset="-78"/>
+                <a:ea typeface="Amiri" pitchFamily="2" charset="-78"/>
                 <a:cs typeface="Amiri" pitchFamily="2" charset="-78"/>
               </a:rPr>
               <a:t>بَنْتٌ</a:t>
@@ -15467,6 +15540,7 @@
                   <a:srgbClr val="1F2A37"/>
                 </a:solidFill>
                 <a:latin typeface="Amiri" pitchFamily="2" charset="-78"/>
+                <a:ea typeface="Amiri" pitchFamily="2" charset="-78"/>
                 <a:cs typeface="Amiri" pitchFamily="2" charset="-78"/>
               </a:rPr>
               <a:t>بَيْتٌ</a:t>
@@ -15768,6 +15842,7 @@
                   <a:srgbClr val="1F2A37"/>
                 </a:solidFill>
                 <a:latin typeface="Amiri" pitchFamily="2" charset="-78"/>
+                <a:ea typeface="Amiri" pitchFamily="2" charset="-78"/>
                 <a:cs typeface="Amiri" pitchFamily="2" charset="-78"/>
               </a:rPr>
               <a:t>مُعَلِّمٌ</a:t>
@@ -15869,6 +15944,7 @@
                   <a:srgbClr val="9AA1AB"/>
                 </a:solidFill>
                 <a:latin typeface="Amiri" pitchFamily="2" charset="-78"/>
+                <a:ea typeface="Amiri" pitchFamily="2" charset="-78"/>
                 <a:cs typeface="Amiri" pitchFamily="2" charset="-78"/>
               </a:rPr>
               <a:t>مُعَلِمٌ</a:t>
@@ -15970,6 +16046,7 @@
                   <a:srgbClr val="9AA1AB"/>
                 </a:solidFill>
                 <a:latin typeface="Amiri" pitchFamily="2" charset="-78"/>
+                <a:ea typeface="Amiri" pitchFamily="2" charset="-78"/>
                 <a:cs typeface="Amiri" pitchFamily="2" charset="-78"/>
               </a:rPr>
               <a:t>مَعَلِّمٌ</a:t>
@@ -16244,6 +16321,7 @@
                   <a:srgbClr val="9AA1AB"/>
                 </a:solidFill>
                 <a:latin typeface="Amiri" pitchFamily="2" charset="-78"/>
+                <a:ea typeface="Amiri" pitchFamily="2" charset="-78"/>
                 <a:cs typeface="Amiri" pitchFamily="2" charset="-78"/>
               </a:rPr>
               <a:t>كِتَبٌ</a:t>
@@ -16372,6 +16450,7 @@
                   <a:srgbClr val="1F2A37"/>
                 </a:solidFill>
                 <a:latin typeface="Amiri" pitchFamily="2" charset="-78"/>
+                <a:ea typeface="Amiri" pitchFamily="2" charset="-78"/>
                 <a:cs typeface="Amiri" pitchFamily="2" charset="-78"/>
               </a:rPr>
               <a:t>كِتَابٌ</a:t>
@@ -16473,6 +16552,7 @@
                   <a:srgbClr val="9AA1AB"/>
                 </a:solidFill>
                 <a:latin typeface="Amiri" pitchFamily="2" charset="-78"/>
+                <a:ea typeface="Amiri" pitchFamily="2" charset="-78"/>
                 <a:cs typeface="Amiri" pitchFamily="2" charset="-78"/>
               </a:rPr>
               <a:t>كُتَابٌ</a:t>
@@ -16774,6 +16854,7 @@
                   <a:srgbClr val="1F2A37"/>
                 </a:solidFill>
                 <a:latin typeface="Amiri" pitchFamily="2" charset="-78"/>
+                <a:ea typeface="Amiri" pitchFamily="2" charset="-78"/>
                 <a:cs typeface="Amiri" pitchFamily="2" charset="-78"/>
               </a:rPr>
               <a:t>بِنْتٌ</a:t>
@@ -16875,6 +16956,7 @@
                   <a:srgbClr val="9AA1AB"/>
                 </a:solidFill>
                 <a:latin typeface="Amiri" pitchFamily="2" charset="-78"/>
+                <a:ea typeface="Amiri" pitchFamily="2" charset="-78"/>
                 <a:cs typeface="Amiri" pitchFamily="2" charset="-78"/>
               </a:rPr>
               <a:t>بَيْتٌ</a:t>
@@ -16976,6 +17058,7 @@
                   <a:srgbClr val="9AA1AB"/>
                 </a:solidFill>
                 <a:latin typeface="Amiri" pitchFamily="2" charset="-78"/>
+                <a:ea typeface="Amiri" pitchFamily="2" charset="-78"/>
                 <a:cs typeface="Amiri" pitchFamily="2" charset="-78"/>
               </a:rPr>
               <a:t>بِتْنٌ</a:t>
@@ -17250,6 +17333,7 @@
                   <a:srgbClr val="9AA1AB"/>
                 </a:solidFill>
                 <a:latin typeface="Amiri" pitchFamily="2" charset="-78"/>
+                <a:ea typeface="Amiri" pitchFamily="2" charset="-78"/>
                 <a:cs typeface="Amiri" pitchFamily="2" charset="-78"/>
               </a:rPr>
               <a:t>جَدِدٌ</a:t>
@@ -17351,6 +17435,7 @@
                   <a:srgbClr val="9AA1AB"/>
                 </a:solidFill>
                 <a:latin typeface="Amiri" pitchFamily="2" charset="-78"/>
+                <a:ea typeface="Amiri" pitchFamily="2" charset="-78"/>
                 <a:cs typeface="Amiri" pitchFamily="2" charset="-78"/>
               </a:rPr>
               <a:t>حَدِيدٌ</a:t>
@@ -17479,6 +17564,7 @@
                   <a:srgbClr val="1F2A37"/>
                 </a:solidFill>
                 <a:latin typeface="Amiri" pitchFamily="2" charset="-78"/>
+                <a:ea typeface="Amiri" pitchFamily="2" charset="-78"/>
                 <a:cs typeface="Amiri" pitchFamily="2" charset="-78"/>
               </a:rPr>
               <a:t>جَدِيدٌ</a:t>
@@ -17819,6 +17905,7 @@
                   <a:srgbClr val="D4AF37"/>
                 </a:solidFill>
                 <a:latin typeface="Amiri" pitchFamily="2" charset="-78"/>
+                <a:ea typeface="Amiri" pitchFamily="2" charset="-78"/>
                 <a:cs typeface="Amiri" pitchFamily="2" charset="-78"/>
               </a:rPr>
               <a:t>م</a:t>
@@ -18139,6 +18226,7 @@
                   <a:srgbClr val="8A6D1E"/>
                 </a:solidFill>
                 <a:latin typeface="Amiri" pitchFamily="2" charset="-78"/>
+                <a:ea typeface="Amiri" pitchFamily="2" charset="-78"/>
                 <a:cs typeface="Amiri" pitchFamily="2" charset="-78"/>
               </a:rPr>
               <a:t>اِكْتَشِفِ الخَطَأَ</a:t>
@@ -18325,6 +18413,7 @@
                   <a:srgbClr val="1B3B6F"/>
                 </a:solidFill>
                 <a:latin typeface="Amiri" pitchFamily="2" charset="-78"/>
+                <a:ea typeface="Amiri" pitchFamily="2" charset="-78"/>
                 <a:cs typeface="Amiri" pitchFamily="2" charset="-78"/>
               </a:rPr>
               <a:t>بَيْتٌ</a:t>
@@ -18351,6 +18440,7 @@
                   <a:srgbClr val="1B3B6F"/>
                 </a:solidFill>
                 <a:latin typeface="Amiri" pitchFamily="2" charset="-78"/>
+                <a:ea typeface="Amiri" pitchFamily="2" charset="-78"/>
                 <a:cs typeface="Amiri" pitchFamily="2" charset="-78"/>
               </a:rPr>
               <a:t>بَنْتٌ</a:t>
@@ -18802,6 +18892,7 @@
                   <a:srgbClr val="1B3B6F"/>
                 </a:solidFill>
                 <a:latin typeface="Amiri" pitchFamily="2" charset="-78"/>
+                <a:ea typeface="Amiri" pitchFamily="2" charset="-78"/>
                 <a:cs typeface="Amiri" pitchFamily="2" charset="-78"/>
               </a:rPr>
               <a:t>بَابٌ</a:t>
@@ -18828,6 +18919,7 @@
                   <a:srgbClr val="1B3B6F"/>
                 </a:solidFill>
                 <a:latin typeface="Amiri" pitchFamily="2" charset="-78"/>
+                <a:ea typeface="Amiri" pitchFamily="2" charset="-78"/>
                 <a:cs typeface="Amiri" pitchFamily="2" charset="-78"/>
               </a:rPr>
               <a:t>ب</a:t>
@@ -19279,6 +19371,7 @@
                   <a:srgbClr val="1B3B6F"/>
                 </a:solidFill>
                 <a:latin typeface="Amiri" pitchFamily="2" charset="-78"/>
+                <a:ea typeface="Amiri" pitchFamily="2" charset="-78"/>
                 <a:cs typeface="Amiri" pitchFamily="2" charset="-78"/>
               </a:rPr>
               <a:t>مُعَلِّمٌ</a:t>
@@ -19305,6 +19398,7 @@
                   <a:srgbClr val="1B3B6F"/>
                 </a:solidFill>
                 <a:latin typeface="Amiri" pitchFamily="2" charset="-78"/>
+                <a:ea typeface="Amiri" pitchFamily="2" charset="-78"/>
                 <a:cs typeface="Amiri" pitchFamily="2" charset="-78"/>
               </a:rPr>
               <a:t>مُعَلِمٌ</a:t>
@@ -19756,6 +19850,7 @@
                   <a:srgbClr val="1B3B6F"/>
                 </a:solidFill>
                 <a:latin typeface="Amiri" pitchFamily="2" charset="-78"/>
+                <a:ea typeface="Amiri" pitchFamily="2" charset="-78"/>
                 <a:cs typeface="Amiri" pitchFamily="2" charset="-78"/>
               </a:rPr>
               <a:t>قَلَمٌ جَدِيدٌ</a:t>
@@ -20220,6 +20315,7 @@
                   <a:srgbClr val="1B3B6F"/>
                 </a:solidFill>
                 <a:latin typeface="Amiri" pitchFamily="2" charset="-78"/>
+                <a:ea typeface="Amiri" pitchFamily="2" charset="-78"/>
                 <a:cs typeface="Amiri" pitchFamily="2" charset="-78"/>
               </a:rPr>
               <a:t>عَيْنٌ</a:t>
@@ -20246,6 +20342,7 @@
                   <a:srgbClr val="1B3B6F"/>
                 </a:solidFill>
                 <a:latin typeface="Amiri" pitchFamily="2" charset="-78"/>
+                <a:ea typeface="Amiri" pitchFamily="2" charset="-78"/>
                 <a:cs typeface="Amiri" pitchFamily="2" charset="-78"/>
               </a:rPr>
               <a:t>غَيْنٌ</a:t>
@@ -20824,6 +20921,7 @@
                   <a:srgbClr val="D4AF37"/>
                 </a:solidFill>
                 <a:latin typeface="Amiri" pitchFamily="2" charset="-78"/>
+                <a:ea typeface="Amiri" pitchFamily="2" charset="-78"/>
                 <a:cs typeface="Amiri" pitchFamily="2" charset="-78"/>
               </a:rPr>
               <a:t>م</a:t>
@@ -21144,6 +21242,7 @@
                   <a:srgbClr val="8A6D1E"/>
                 </a:solidFill>
                 <a:latin typeface="Amiri" pitchFamily="2" charset="-78"/>
+                <a:ea typeface="Amiri" pitchFamily="2" charset="-78"/>
                 <a:cs typeface="Amiri" pitchFamily="2" charset="-78"/>
               </a:rPr>
               <a:t>الإِجَابَاتُ</a:t>
@@ -21330,6 +21429,7 @@
                   <a:srgbClr val="1B3B6F"/>
                 </a:solidFill>
                 <a:latin typeface="Amiri" pitchFamily="2" charset="-78"/>
+                <a:ea typeface="Amiri" pitchFamily="2" charset="-78"/>
                 <a:cs typeface="Amiri" pitchFamily="2" charset="-78"/>
               </a:rPr>
               <a:t>بَيْتٌ</a:t>
@@ -21356,6 +21456,7 @@
                   <a:srgbClr val="1B3B6F"/>
                 </a:solidFill>
                 <a:latin typeface="Amiri" pitchFamily="2" charset="-78"/>
+                <a:ea typeface="Amiri" pitchFamily="2" charset="-78"/>
                 <a:cs typeface="Amiri" pitchFamily="2" charset="-78"/>
               </a:rPr>
               <a:t>بَنْتٌ</a:t>
@@ -21872,6 +21973,7 @@
                   <a:srgbClr val="1B3B6F"/>
                 </a:solidFill>
                 <a:latin typeface="Amiri" pitchFamily="2" charset="-78"/>
+                <a:ea typeface="Amiri" pitchFamily="2" charset="-78"/>
                 <a:cs typeface="Amiri" pitchFamily="2" charset="-78"/>
               </a:rPr>
               <a:t>بَابٌ</a:t>
@@ -21898,6 +22000,7 @@
                   <a:srgbClr val="1B3B6F"/>
                 </a:solidFill>
                 <a:latin typeface="Amiri" pitchFamily="2" charset="-78"/>
+                <a:ea typeface="Amiri" pitchFamily="2" charset="-78"/>
                 <a:cs typeface="Amiri" pitchFamily="2" charset="-78"/>
               </a:rPr>
               <a:t>ب</a:t>
@@ -22414,6 +22517,7 @@
                   <a:srgbClr val="1B3B6F"/>
                 </a:solidFill>
                 <a:latin typeface="Amiri" pitchFamily="2" charset="-78"/>
+                <a:ea typeface="Amiri" pitchFamily="2" charset="-78"/>
                 <a:cs typeface="Amiri" pitchFamily="2" charset="-78"/>
               </a:rPr>
               <a:t>مُعَلِّمٌ</a:t>
@@ -22440,6 +22544,7 @@
                   <a:srgbClr val="1B3B6F"/>
                 </a:solidFill>
                 <a:latin typeface="Amiri" pitchFamily="2" charset="-78"/>
+                <a:ea typeface="Amiri" pitchFamily="2" charset="-78"/>
                 <a:cs typeface="Amiri" pitchFamily="2" charset="-78"/>
               </a:rPr>
               <a:t>مُعَلِمٌ</a:t>
@@ -22956,6 +23061,7 @@
                   <a:srgbClr val="1B3B6F"/>
                 </a:solidFill>
                 <a:latin typeface="Amiri" pitchFamily="2" charset="-78"/>
+                <a:ea typeface="Amiri" pitchFamily="2" charset="-78"/>
                 <a:cs typeface="Amiri" pitchFamily="2" charset="-78"/>
               </a:rPr>
               <a:t>قَلَمٌ جَدِيدٌ</a:t>
@@ -23485,6 +23591,7 @@
                   <a:srgbClr val="1B3B6F"/>
                 </a:solidFill>
                 <a:latin typeface="Amiri" pitchFamily="2" charset="-78"/>
+                <a:ea typeface="Amiri" pitchFamily="2" charset="-78"/>
                 <a:cs typeface="Amiri" pitchFamily="2" charset="-78"/>
               </a:rPr>
               <a:t>عَيْنٌ</a:t>
@@ -23511,6 +23618,7 @@
                   <a:srgbClr val="1B3B6F"/>
                 </a:solidFill>
                 <a:latin typeface="Amiri" pitchFamily="2" charset="-78"/>
+                <a:ea typeface="Amiri" pitchFamily="2" charset="-78"/>
                 <a:cs typeface="Amiri" pitchFamily="2" charset="-78"/>
               </a:rPr>
               <a:t>غَيْنٌ</a:t>
@@ -24154,6 +24262,7 @@
                   <a:srgbClr val="D4AF37"/>
                 </a:solidFill>
                 <a:latin typeface="Amiri" pitchFamily="2" charset="-78"/>
+                <a:ea typeface="Amiri" pitchFamily="2" charset="-78"/>
                 <a:cs typeface="Amiri" pitchFamily="2" charset="-78"/>
               </a:rPr>
               <a:t>م</a:t>
@@ -24474,6 +24583,7 @@
                   <a:srgbClr val="8A6D1E"/>
                 </a:solidFill>
                 <a:latin typeface="Amiri" pitchFamily="2" charset="-78"/>
+                <a:ea typeface="Amiri" pitchFamily="2" charset="-78"/>
                 <a:cs typeface="Amiri" pitchFamily="2" charset="-78"/>
               </a:rPr>
               <a:t>اِسْمَعْ، تَذَكَّرْ، اُكْتُبْ، ثُمَّ صَحِّحْ</a:t>
@@ -24754,6 +24864,7 @@
                   <a:srgbClr val="1B3B6F"/>
                 </a:solidFill>
                 <a:latin typeface="Amiri" pitchFamily="2" charset="-78"/>
+                <a:ea typeface="Amiri" pitchFamily="2" charset="-78"/>
                 <a:cs typeface="Amiri" pitchFamily="2" charset="-78"/>
               </a:rPr>
               <a:t>بَابٌ · كِتَابٌ · قَلَمٌ · مَدْرَسَةٌ · بَيْتٌ</a:t>
@@ -24843,6 +24954,7 @@
                   <a:srgbClr val="5A6472"/>
                 </a:solidFill>
                 <a:latin typeface="Amiri" pitchFamily="2" charset="-78"/>
+                <a:ea typeface="Amiri" pitchFamily="2" charset="-78"/>
                 <a:cs typeface="Amiri" pitchFamily="2" charset="-78"/>
               </a:rPr>
               <a:t>ة</a:t>
@@ -25011,6 +25123,7 @@
                   <a:srgbClr val="1B3B6F"/>
                 </a:solidFill>
                 <a:latin typeface="Amiri" pitchFamily="2" charset="-78"/>
+                <a:ea typeface="Amiri" pitchFamily="2" charset="-78"/>
                 <a:cs typeface="Amiri" pitchFamily="2" charset="-78"/>
               </a:rPr>
               <a:t>مُعَلِّمٌ · طَالِبٌ · يَدٌ · عَيْنٌ · كَلِمَةٌ</a:t>
@@ -25190,6 +25303,7 @@
                   <a:srgbClr val="1B3B6F"/>
                 </a:solidFill>
                 <a:latin typeface="Amiri" pitchFamily="2" charset="-78"/>
+                <a:ea typeface="Amiri" pitchFamily="2" charset="-78"/>
                 <a:cs typeface="Amiri" pitchFamily="2" charset="-78"/>
               </a:rPr>
               <a:t>ثَلَاثَةٌ · سَبْعَةٌ · وَلَدٌ · بِنْتٌ · جَدِيدٌ</a:t>
@@ -25399,6 +25513,7 @@
                   <a:srgbClr val="D4AF37"/>
                 </a:solidFill>
                 <a:latin typeface="Amiri" pitchFamily="2" charset="-78"/>
+                <a:ea typeface="Amiri" pitchFamily="2" charset="-78"/>
                 <a:cs typeface="Amiri" pitchFamily="2" charset="-78"/>
               </a:rPr>
               <a:t>م</a:t>
@@ -25719,6 +25834,7 @@
                   <a:srgbClr val="8A6D1E"/>
                 </a:solidFill>
                 <a:latin typeface="Amiri" pitchFamily="2" charset="-78"/>
+                <a:ea typeface="Amiri" pitchFamily="2" charset="-78"/>
                 <a:cs typeface="Amiri" pitchFamily="2" charset="-78"/>
               </a:rPr>
               <a:t>التَّحَدُّثُ</a:t>
@@ -26489,6 +26605,7 @@
                   <a:srgbClr val="1B3B6F"/>
                 </a:solidFill>
                 <a:latin typeface="Amiri" pitchFamily="2" charset="-78"/>
+                <a:ea typeface="Amiri" pitchFamily="2" charset="-78"/>
                 <a:cs typeface="Amiri" pitchFamily="2" charset="-78"/>
               </a:rPr>
               <a:t>اُكْتُبْ: بَابٌ</a:t>
@@ -26626,6 +26743,7 @@
                   <a:srgbClr val="1B3B6F"/>
                 </a:solidFill>
                 <a:latin typeface="Amiri" pitchFamily="2" charset="-78"/>
+                <a:ea typeface="Amiri" pitchFamily="2" charset="-78"/>
                 <a:cs typeface="Amiri" pitchFamily="2" charset="-78"/>
               </a:rPr>
               <a:t>هَلْ هُوَ صَحِيحٌ؟</a:t>
@@ -26763,6 +26881,7 @@
                   <a:srgbClr val="1B3B6F"/>
                 </a:solidFill>
                 <a:latin typeface="Amiri" pitchFamily="2" charset="-78"/>
+                <a:ea typeface="Amiri" pitchFamily="2" charset="-78"/>
                 <a:cs typeface="Amiri" pitchFamily="2" charset="-78"/>
               </a:rPr>
               <a:t>مَا الرَّمْزُ؟</a:t>
@@ -26900,6 +27019,7 @@
                   <a:srgbClr val="1B3B6F"/>
                 </a:solidFill>
                 <a:latin typeface="Amiri" pitchFamily="2" charset="-78"/>
+                <a:ea typeface="Amiri" pitchFamily="2" charset="-78"/>
                 <a:cs typeface="Amiri" pitchFamily="2" charset="-78"/>
               </a:rPr>
               <a:t>اُكْتُبْ جُمْلَةً عَنْ نَفْسِكَ.</a:t>
@@ -27075,6 +27195,7 @@
                   <a:srgbClr val="1D5FBF"/>
                 </a:solidFill>
                 <a:latin typeface="Amiri" pitchFamily="2" charset="-78"/>
+                <a:ea typeface="Amiri" pitchFamily="2" charset="-78"/>
                 <a:cs typeface="Amiri" pitchFamily="2" charset="-78"/>
               </a:rPr>
               <a:t>صَحِيحٌ !</a:t>
@@ -27178,6 +27299,7 @@
                   <a:srgbClr val="1F2A37"/>
                 </a:solidFill>
                 <a:latin typeface="Amiri" pitchFamily="2" charset="-78"/>
+                <a:ea typeface="Amiri" pitchFamily="2" charset="-78"/>
                 <a:cs typeface="Amiri" pitchFamily="2" charset="-78"/>
               </a:rPr>
               <a:t>الرَّمْزُ ___ .</a:t>
@@ -27281,6 +27403,7 @@
                   <a:srgbClr val="1F2A37"/>
                 </a:solidFill>
                 <a:latin typeface="Amiri" pitchFamily="2" charset="-78"/>
+                <a:ea typeface="Amiri" pitchFamily="2" charset="-78"/>
                 <a:cs typeface="Amiri" pitchFamily="2" charset="-78"/>
               </a:rPr>
               <a:t>أَنَا ___ .</a:t>
@@ -27384,6 +27507,7 @@
                   <a:srgbClr val="1F2A37"/>
                 </a:solidFill>
                 <a:latin typeface="Amiri" pitchFamily="2" charset="-78"/>
+                <a:ea typeface="Amiri" pitchFamily="2" charset="-78"/>
                 <a:cs typeface="Amiri" pitchFamily="2" charset="-78"/>
               </a:rPr>
               <a:t>كَتَبَ / كَتَبَتْ ___ .</a:t>
@@ -27557,6 +27681,7 @@
                   <a:srgbClr val="1F2A37"/>
                 </a:solidFill>
                 <a:latin typeface="Amiri" pitchFamily="2" charset="-78"/>
+                <a:ea typeface="Amiri" pitchFamily="2" charset="-78"/>
                 <a:cs typeface="Amiri" pitchFamily="2" charset="-78"/>
               </a:rPr>
               <a:t>اُكْتُبْ: بَيْتٌ</a:t>
@@ -27696,6 +27821,7 @@
                   <a:srgbClr val="1F2A37"/>
                 </a:solidFill>
                 <a:latin typeface="Amiri" pitchFamily="2" charset="-78"/>
+                <a:ea typeface="Amiri" pitchFamily="2" charset="-78"/>
                 <a:cs typeface="Amiri" pitchFamily="2" charset="-78"/>
               </a:rPr>
               <a:t>كَتَبْتُ. هَلْ هُوَ صَحِيحٌ؟</a:t>
@@ -27867,6 +27993,7 @@
                   <a:srgbClr val="D4AF37"/>
                 </a:solidFill>
                 <a:latin typeface="Amiri" pitchFamily="2" charset="-78"/>
+                <a:ea typeface="Amiri" pitchFamily="2" charset="-78"/>
                 <a:cs typeface="Amiri" pitchFamily="2" charset="-78"/>
               </a:rPr>
               <a:t>م</a:t>
@@ -28187,6 +28314,7 @@
                   <a:srgbClr val="8A6D1E"/>
                 </a:solidFill>
                 <a:latin typeface="Amiri" pitchFamily="2" charset="-78"/>
+                <a:ea typeface="Amiri" pitchFamily="2" charset="-78"/>
                 <a:cs typeface="Amiri" pitchFamily="2" charset="-78"/>
               </a:rPr>
               <a:t>آدَابُ الصَّفِّ</a:t>
@@ -29718,6 +29846,7 @@
                   <a:srgbClr val="D4AF37"/>
                 </a:solidFill>
                 <a:latin typeface="Amiri" pitchFamily="2" charset="-78"/>
+                <a:ea typeface="Amiri" pitchFamily="2" charset="-78"/>
                 <a:cs typeface="Amiri" pitchFamily="2" charset="-78"/>
               </a:rPr>
               <a:t>م</a:t>
@@ -30038,6 +30167,7 @@
                   <a:srgbClr val="8A6D1E"/>
                 </a:solidFill>
                 <a:latin typeface="Amiri" pitchFamily="2" charset="-78"/>
+                <a:ea typeface="Amiri" pitchFamily="2" charset="-78"/>
                 <a:cs typeface="Amiri" pitchFamily="2" charset="-78"/>
               </a:rPr>
               <a:t>قَيِّمِ الوُضُوحَ</a:t>
@@ -31248,6 +31378,7 @@
                   <a:srgbClr val="D4AF37"/>
                 </a:solidFill>
                 <a:latin typeface="Amiri" pitchFamily="2" charset="-78"/>
+                <a:ea typeface="Amiri" pitchFamily="2" charset="-78"/>
                 <a:cs typeface="Amiri" pitchFamily="2" charset="-78"/>
               </a:rPr>
               <a:t>م</a:t>
@@ -31568,6 +31699,7 @@
                   <a:srgbClr val="8A6D1E"/>
                 </a:solidFill>
                 <a:latin typeface="Amiri" pitchFamily="2" charset="-78"/>
+                <a:ea typeface="Amiri" pitchFamily="2" charset="-78"/>
                 <a:cs typeface="Amiri" pitchFamily="2" charset="-78"/>
               </a:rPr>
               <a:t>قَيِّمْ عَمَلَكَ</a:t>
@@ -32725,6 +32857,7 @@
                   <a:srgbClr val="D4AF37"/>
                 </a:solidFill>
                 <a:latin typeface="Amiri" pitchFamily="2" charset="-78"/>
+                <a:ea typeface="Amiri" pitchFamily="2" charset="-78"/>
                 <a:cs typeface="Amiri" pitchFamily="2" charset="-78"/>
               </a:rPr>
               <a:t>م</a:t>
@@ -33045,6 +33178,7 @@
                   <a:srgbClr val="8A6D1E"/>
                 </a:solidFill>
                 <a:latin typeface="Amiri" pitchFamily="2" charset="-78"/>
+                <a:ea typeface="Amiri" pitchFamily="2" charset="-78"/>
                 <a:cs typeface="Amiri" pitchFamily="2" charset="-78"/>
               </a:rPr>
               <a:t>تَذْكِرَةُ الخُرُوجِ</a:t>
@@ -33319,6 +33453,7 @@
                   <a:srgbClr val="1F2A37"/>
                 </a:solidFill>
                 <a:latin typeface="Amiri" pitchFamily="2" charset="-78"/>
+                <a:ea typeface="Amiri" pitchFamily="2" charset="-78"/>
                 <a:cs typeface="Amiri" pitchFamily="2" charset="-78"/>
               </a:rPr>
               <a:t>مَدْرَسَةٌ</a:t>
@@ -33420,6 +33555,7 @@
                   <a:srgbClr val="1F2A37"/>
                 </a:solidFill>
                 <a:latin typeface="Amiri" pitchFamily="2" charset="-78"/>
+                <a:ea typeface="Amiri" pitchFamily="2" charset="-78"/>
                 <a:cs typeface="Amiri" pitchFamily="2" charset="-78"/>
               </a:rPr>
               <a:t>مَدَرَسَةٌ</a:t>
@@ -33521,6 +33657,7 @@
                   <a:srgbClr val="1F2A37"/>
                 </a:solidFill>
                 <a:latin typeface="Amiri" pitchFamily="2" charset="-78"/>
+                <a:ea typeface="Amiri" pitchFamily="2" charset="-78"/>
                 <a:cs typeface="Amiri" pitchFamily="2" charset="-78"/>
               </a:rPr>
               <a:t>مَدْرَسَهٌ</a:t>
@@ -34438,6 +34575,7 @@
                   <a:srgbClr val="D4AF37"/>
                 </a:solidFill>
                 <a:latin typeface="Amiri" pitchFamily="2" charset="-78"/>
+                <a:ea typeface="Amiri" pitchFamily="2" charset="-78"/>
                 <a:cs typeface="Amiri" pitchFamily="2" charset="-78"/>
               </a:rPr>
               <a:t>م</a:t>
@@ -34758,6 +34896,7 @@
                   <a:srgbClr val="8A6D1E"/>
                 </a:solidFill>
                 <a:latin typeface="Amiri" pitchFamily="2" charset="-78"/>
+                <a:ea typeface="Amiri" pitchFamily="2" charset="-78"/>
                 <a:cs typeface="Amiri" pitchFamily="2" charset="-78"/>
               </a:rPr>
               <a:t>إِجَابَاتُ تَذْكِرَةِ الخُرُوجِ</a:t>
@@ -35059,6 +35198,7 @@
                   <a:srgbClr val="1F2A37"/>
                 </a:solidFill>
                 <a:latin typeface="Amiri" pitchFamily="2" charset="-78"/>
+                <a:ea typeface="Amiri" pitchFamily="2" charset="-78"/>
                 <a:cs typeface="Amiri" pitchFamily="2" charset="-78"/>
               </a:rPr>
               <a:t>مَدْرَسَةٌ</a:t>
@@ -35160,6 +35300,7 @@
                   <a:srgbClr val="9AA1AB"/>
                 </a:solidFill>
                 <a:latin typeface="Amiri" pitchFamily="2" charset="-78"/>
+                <a:ea typeface="Amiri" pitchFamily="2" charset="-78"/>
                 <a:cs typeface="Amiri" pitchFamily="2" charset="-78"/>
               </a:rPr>
               <a:t>مَدَرَسَةٌ</a:t>
@@ -35261,6 +35402,7 @@
                   <a:srgbClr val="9AA1AB"/>
                 </a:solidFill>
                 <a:latin typeface="Amiri" pitchFamily="2" charset="-78"/>
+                <a:ea typeface="Amiri" pitchFamily="2" charset="-78"/>
                 <a:cs typeface="Amiri" pitchFamily="2" charset="-78"/>
               </a:rPr>
               <a:t>مَدْرَسَهٌ</a:t>
@@ -35312,6 +35454,7 @@
                   <a:srgbClr val="8A6D1E"/>
                 </a:solidFill>
                 <a:latin typeface="Amiri" pitchFamily="2" charset="-78"/>
+                <a:ea typeface="Amiri" pitchFamily="2" charset="-78"/>
                 <a:cs typeface="Amiri" pitchFamily="2" charset="-78"/>
               </a:rPr>
               <a:t>ة</a:t>
@@ -36372,6 +36515,7 @@
                   <a:srgbClr val="D4AF37"/>
                 </a:solidFill>
                 <a:latin typeface="Amiri" pitchFamily="2" charset="-78"/>
+                <a:ea typeface="Amiri" pitchFamily="2" charset="-78"/>
                 <a:cs typeface="Amiri" pitchFamily="2" charset="-78"/>
               </a:rPr>
               <a:t>م</a:t>
@@ -36692,6 +36836,7 @@
                   <a:srgbClr val="8A6D1E"/>
                 </a:solidFill>
                 <a:latin typeface="Amiri" pitchFamily="2" charset="-78"/>
+                <a:ea typeface="Amiri" pitchFamily="2" charset="-78"/>
                 <a:cs typeface="Amiri" pitchFamily="2" charset="-78"/>
               </a:rPr>
               <a:t>التَّحْضِيرُ لِلدَّرْسِ القَادِمِ</a:t>
@@ -36905,6 +37050,7 @@
                   <a:srgbClr val="1B3B6F"/>
                 </a:solidFill>
                 <a:latin typeface="Amiri" pitchFamily="2" charset="-78"/>
+                <a:ea typeface="Amiri" pitchFamily="2" charset="-78"/>
                 <a:cs typeface="Amiri" pitchFamily="2" charset="-78"/>
               </a:rPr>
               <a:t>مدرسة</a:t>
@@ -36951,11 +37097,12 @@
               <a:buNone/>
             </a:pPr>
             <a:r>
-              <a:rPr lang="en-US" sz="1000" i="1" dirty="0">
+              <a:rPr lang="ar-SA" sz="1000" i="1" dirty="0">
                 <a:solidFill>
                   <a:srgbClr val="5A6472"/>
                 </a:solidFill>
                 <a:latin typeface="Calibri" pitchFamily="34" charset="0"/>
+                <a:ea typeface="Amiri" pitchFamily="2" charset="-78"/>
                 <a:cs typeface="Amiri" pitchFamily="2" charset="-78"/>
               </a:rPr>
               <a:t>  مَدْرَسَةٌ</a:t>
@@ -36994,6 +37141,7 @@
                   <a:srgbClr val="1B3B6F"/>
                 </a:solidFill>
                 <a:latin typeface="Amiri" pitchFamily="2" charset="-78"/>
+                <a:ea typeface="Amiri" pitchFamily="2" charset="-78"/>
                 <a:cs typeface="Amiri" pitchFamily="2" charset="-78"/>
               </a:rPr>
               <a:t>باب</a:t>
@@ -37040,11 +37188,12 @@
               <a:buNone/>
             </a:pPr>
             <a:r>
-              <a:rPr lang="en-US" sz="1000" i="1" dirty="0">
+              <a:rPr lang="ar-SA" sz="1000" i="1" dirty="0">
                 <a:solidFill>
                   <a:srgbClr val="5A6472"/>
                 </a:solidFill>
                 <a:latin typeface="Calibri" pitchFamily="34" charset="0"/>
+                <a:ea typeface="Amiri" pitchFamily="2" charset="-78"/>
                 <a:cs typeface="Amiri" pitchFamily="2" charset="-78"/>
               </a:rPr>
               <a:t>  بَابٌ</a:t>
@@ -37083,6 +37232,7 @@
                   <a:srgbClr val="1B3B6F"/>
                 </a:solidFill>
                 <a:latin typeface="Amiri" pitchFamily="2" charset="-78"/>
+                <a:ea typeface="Amiri" pitchFamily="2" charset="-78"/>
                 <a:cs typeface="Amiri" pitchFamily="2" charset="-78"/>
               </a:rPr>
               <a:t>مخرج</a:t>
@@ -37129,11 +37279,12 @@
               <a:buNone/>
             </a:pPr>
             <a:r>
-              <a:rPr lang="en-US" sz="1000" i="1" dirty="0">
+              <a:rPr lang="ar-SA" sz="1000" i="1" dirty="0">
                 <a:solidFill>
                   <a:srgbClr val="5A6472"/>
                 </a:solidFill>
                 <a:latin typeface="Calibri" pitchFamily="34" charset="0"/>
+                <a:ea typeface="Amiri" pitchFamily="2" charset="-78"/>
                 <a:cs typeface="Amiri" pitchFamily="2" charset="-78"/>
               </a:rPr>
               <a:t>  مَخْرَجٌ</a:t>
@@ -37172,6 +37323,7 @@
                   <a:srgbClr val="1B3B6F"/>
                 </a:solidFill>
                 <a:latin typeface="Amiri" pitchFamily="2" charset="-78"/>
+                <a:ea typeface="Amiri" pitchFamily="2" charset="-78"/>
                 <a:cs typeface="Amiri" pitchFamily="2" charset="-78"/>
               </a:rPr>
               <a:t>مفتوح</a:t>
@@ -37218,11 +37370,12 @@
               <a:buNone/>
             </a:pPr>
             <a:r>
-              <a:rPr lang="en-US" sz="1000" i="1" dirty="0">
+              <a:rPr lang="ar-SA" sz="1000" i="1" dirty="0">
                 <a:solidFill>
                   <a:srgbClr val="5A6472"/>
                 </a:solidFill>
                 <a:latin typeface="Calibri" pitchFamily="34" charset="0"/>
+                <a:ea typeface="Amiri" pitchFamily="2" charset="-78"/>
                 <a:cs typeface="Amiri" pitchFamily="2" charset="-78"/>
               </a:rPr>
               <a:t>  مَفْتُوحٌ</a:t>
@@ -37261,6 +37414,7 @@
                   <a:srgbClr val="1B3B6F"/>
                 </a:solidFill>
                 <a:latin typeface="Amiri" pitchFamily="2" charset="-78"/>
+                <a:ea typeface="Amiri" pitchFamily="2" charset="-78"/>
                 <a:cs typeface="Amiri" pitchFamily="2" charset="-78"/>
               </a:rPr>
               <a:t>مغلق</a:t>
@@ -37307,11 +37461,12 @@
               <a:buNone/>
             </a:pPr>
             <a:r>
-              <a:rPr lang="en-US" sz="1000" i="1" dirty="0">
+              <a:rPr lang="ar-SA" sz="1000" i="1" dirty="0">
                 <a:solidFill>
                   <a:srgbClr val="5A6472"/>
                 </a:solidFill>
                 <a:latin typeface="Calibri" pitchFamily="34" charset="0"/>
+                <a:ea typeface="Amiri" pitchFamily="2" charset="-78"/>
                 <a:cs typeface="Amiri" pitchFamily="2" charset="-78"/>
               </a:rPr>
               <a:t>  مُغْلَقٌ</a:t>
@@ -37426,6 +37581,7 @@
                   <a:srgbClr val="1B3B6F"/>
                 </a:solidFill>
                 <a:latin typeface="Amiri" pitchFamily="2" charset="-78"/>
+                <a:ea typeface="Amiri" pitchFamily="2" charset="-78"/>
                 <a:cs typeface="Amiri" pitchFamily="2" charset="-78"/>
               </a:rPr>
               <a:t>بَابٌ · كِتَابٌ · قَلَمٌ …</a:t>
@@ -38095,6 +38251,7 @@
                   <a:srgbClr val="FFFFFF"/>
                 </a:solidFill>
                 <a:latin typeface="Amiri" pitchFamily="2" charset="-78"/>
+                <a:ea typeface="Amiri" pitchFamily="2" charset="-78"/>
                 <a:cs typeface="Amiri" pitchFamily="2" charset="-78"/>
               </a:rPr>
               <a:t>أَحْسَنْتُمْ! إِلَى اللِّقَاءِ</a:t>
@@ -38247,6 +38404,7 @@
                   <a:srgbClr val="D4AF37"/>
                 </a:solidFill>
                 <a:latin typeface="Amiri" pitchFamily="2" charset="-78"/>
+                <a:ea typeface="Amiri" pitchFamily="2" charset="-78"/>
                 <a:cs typeface="Amiri" pitchFamily="2" charset="-78"/>
               </a:rPr>
               <a:t>قِرَاءَةُ النُّصُوصِ غَيْرِ المُشَكَّلَةِ</a:t>
@@ -38380,6 +38538,7 @@
                   <a:srgbClr val="D4AF37"/>
                 </a:solidFill>
                 <a:latin typeface="Amiri" pitchFamily="2" charset="-78"/>
+                <a:ea typeface="Amiri" pitchFamily="2" charset="-78"/>
                 <a:cs typeface="Amiri" pitchFamily="2" charset="-78"/>
               </a:rPr>
               <a:t>م</a:t>
@@ -38700,6 +38859,7 @@
                   <a:srgbClr val="8A6D1E"/>
                 </a:solidFill>
                 <a:latin typeface="Amiri" pitchFamily="2" charset="-78"/>
+                <a:ea typeface="Amiri" pitchFamily="2" charset="-78"/>
                 <a:cs typeface="Amiri" pitchFamily="2" charset="-78"/>
               </a:rPr>
               <a:t>خَرِيطَةُ الدَّرْسِ</a:t>
@@ -39014,6 +39174,7 @@
                   <a:srgbClr val="0E7C86"/>
                 </a:solidFill>
                 <a:latin typeface="Amiri" pitchFamily="2" charset="-78"/>
+                <a:ea typeface="Amiri" pitchFamily="2" charset="-78"/>
                 <a:cs typeface="Amiri" pitchFamily="2" charset="-78"/>
               </a:rPr>
               <a:t>اِبْدَأِ الآنَ</a:t>
@@ -39290,6 +39451,7 @@
                   <a:srgbClr val="1B3B6F"/>
                 </a:solidFill>
                 <a:latin typeface="Amiri" pitchFamily="2" charset="-78"/>
+                <a:ea typeface="Amiri" pitchFamily="2" charset="-78"/>
                 <a:cs typeface="Amiri" pitchFamily="2" charset="-78"/>
               </a:rPr>
               <a:t>كَلِمَاتٌ وَقَوَاعِدُ</a:t>
@@ -39566,6 +39728,7 @@
                   <a:srgbClr val="6B4C9A"/>
                 </a:solidFill>
                 <a:latin typeface="Amiri" pitchFamily="2" charset="-78"/>
+                <a:ea typeface="Amiri" pitchFamily="2" charset="-78"/>
                 <a:cs typeface="Amiri" pitchFamily="2" charset="-78"/>
               </a:rPr>
               <a:t>شَاهِدْ</a:t>
@@ -39842,6 +40005,7 @@
                   <a:srgbClr val="2F6FB0"/>
                 </a:solidFill>
                 <a:latin typeface="Amiri" pitchFamily="2" charset="-78"/>
+                <a:ea typeface="Amiri" pitchFamily="2" charset="-78"/>
                 <a:cs typeface="Amiri" pitchFamily="2" charset="-78"/>
               </a:rPr>
               <a:t>مَعًا</a:t>
@@ -40118,6 +40282,7 @@
                   <a:srgbClr val="1E6B52"/>
                 </a:solidFill>
                 <a:latin typeface="Amiri" pitchFamily="2" charset="-78"/>
+                <a:ea typeface="Amiri" pitchFamily="2" charset="-78"/>
                 <a:cs typeface="Amiri" pitchFamily="2" charset="-78"/>
               </a:rPr>
               <a:t>وَحْدَكَ</a:t>
@@ -40394,6 +40559,7 @@
                   <a:srgbClr val="8A6D1E"/>
                 </a:solidFill>
                 <a:latin typeface="Amiri" pitchFamily="2" charset="-78"/>
+                <a:ea typeface="Amiri" pitchFamily="2" charset="-78"/>
                 <a:cs typeface="Amiri" pitchFamily="2" charset="-78"/>
               </a:rPr>
               <a:t>قَيِّمْ عَمَلَكَ</a:t>
@@ -40670,6 +40836,7 @@
                   <a:srgbClr val="C45A3C"/>
                 </a:solidFill>
                 <a:latin typeface="Amiri" pitchFamily="2" charset="-78"/>
+                <a:ea typeface="Amiri" pitchFamily="2" charset="-78"/>
                 <a:cs typeface="Amiri" pitchFamily="2" charset="-78"/>
               </a:rPr>
               <a:t>اِسْتَعِدَّ</a:t>
@@ -40913,6 +41080,7 @@
                   <a:srgbClr val="D4AF37"/>
                 </a:solidFill>
                 <a:latin typeface="Amiri" pitchFamily="2" charset="-78"/>
+                <a:ea typeface="Amiri" pitchFamily="2" charset="-78"/>
                 <a:cs typeface="Amiri" pitchFamily="2" charset="-78"/>
               </a:rPr>
               <a:t>م</a:t>
@@ -41233,6 +41401,7 @@
                   <a:srgbClr val="8A6D1E"/>
                 </a:solidFill>
                 <a:latin typeface="Amiri" pitchFamily="2" charset="-78"/>
+                <a:ea typeface="Amiri" pitchFamily="2" charset="-78"/>
                 <a:cs typeface="Amiri" pitchFamily="2" charset="-78"/>
               </a:rPr>
               <a:t>اِبْدَأِ الآنَ</a:t>
@@ -41756,6 +41925,7 @@
                   <a:srgbClr val="1B3B6F"/>
                 </a:solidFill>
                 <a:latin typeface="Amiri" pitchFamily="2" charset="-78"/>
+                <a:ea typeface="Amiri" pitchFamily="2" charset="-78"/>
                 <a:cs typeface="Amiri" pitchFamily="2" charset="-78"/>
               </a:rPr>
               <a:t>مَكْتَبٌ</a:t>
@@ -42119,6 +42289,7 @@
                   <a:srgbClr val="1B3B6F"/>
                 </a:solidFill>
                 <a:latin typeface="Amiri" pitchFamily="2" charset="-78"/>
+                <a:ea typeface="Amiri" pitchFamily="2" charset="-78"/>
                 <a:cs typeface="Amiri" pitchFamily="2" charset="-78"/>
               </a:rPr>
               <a:t>مُعَلِّمٌ</a:t>
@@ -42570,6 +42741,7 @@
                   <a:srgbClr val="1F2A37"/>
                 </a:solidFill>
                 <a:latin typeface="Amiri" pitchFamily="2" charset="-78"/>
+                <a:ea typeface="Amiri" pitchFamily="2" charset="-78"/>
                 <a:cs typeface="Amiri" pitchFamily="2" charset="-78"/>
               </a:rPr>
               <a:t>ب ت ث ن ي</a:t>
@@ -42671,6 +42843,7 @@
                   <a:srgbClr val="1F2A37"/>
                 </a:solidFill>
                 <a:latin typeface="Amiri" pitchFamily="2" charset="-78"/>
+                <a:ea typeface="Amiri" pitchFamily="2" charset="-78"/>
                 <a:cs typeface="Amiri" pitchFamily="2" charset="-78"/>
               </a:rPr>
               <a:t>س ش ص ض</a:t>
@@ -42772,6 +42945,7 @@
                   <a:srgbClr val="1F2A37"/>
                 </a:solidFill>
                 <a:latin typeface="Amiri" pitchFamily="2" charset="-78"/>
+                <a:ea typeface="Amiri" pitchFamily="2" charset="-78"/>
                 <a:cs typeface="Amiri" pitchFamily="2" charset="-78"/>
               </a:rPr>
               <a:t>ا د ذ ر ز و</a:t>
@@ -42920,6 +43094,7 @@
                   <a:srgbClr val="1B3B6F"/>
                 </a:solidFill>
                 <a:latin typeface="Amiri" pitchFamily="2" charset="-78"/>
+                <a:ea typeface="Amiri" pitchFamily="2" charset="-78"/>
                 <a:cs typeface="Amiri" pitchFamily="2" charset="-78"/>
               </a:rPr>
               <a:t>إِمْلَاءٌ</a:t>
@@ -43571,6 +43746,7 @@
                   <a:srgbClr val="D4AF37"/>
                 </a:solidFill>
                 <a:latin typeface="Amiri" pitchFamily="2" charset="-78"/>
+                <a:ea typeface="Amiri" pitchFamily="2" charset="-78"/>
                 <a:cs typeface="Amiri" pitchFamily="2" charset="-78"/>
               </a:rPr>
               <a:t>م</a:t>
@@ -43891,6 +44067,7 @@
                   <a:srgbClr val="8A6D1E"/>
                 </a:solidFill>
                 <a:latin typeface="Amiri" pitchFamily="2" charset="-78"/>
+                <a:ea typeface="Amiri" pitchFamily="2" charset="-78"/>
                 <a:cs typeface="Amiri" pitchFamily="2" charset="-78"/>
               </a:rPr>
               <a:t>الإِجَابَاتُ وَالتَّعْلِيلُ</a:t>
@@ -44479,6 +44656,7 @@
                   <a:srgbClr val="1B3B6F"/>
                 </a:solidFill>
                 <a:latin typeface="Amiri" pitchFamily="2" charset="-78"/>
+                <a:ea typeface="Amiri" pitchFamily="2" charset="-78"/>
                 <a:cs typeface="Amiri" pitchFamily="2" charset="-78"/>
               </a:rPr>
               <a:t>مَكْتَبٌ</a:t>
@@ -44907,6 +45085,7 @@
                   <a:srgbClr val="1B3B6F"/>
                 </a:solidFill>
                 <a:latin typeface="Amiri" pitchFamily="2" charset="-78"/>
+                <a:ea typeface="Amiri" pitchFamily="2" charset="-78"/>
                 <a:cs typeface="Amiri" pitchFamily="2" charset="-78"/>
               </a:rPr>
               <a:t>مُعَلِّمٌ</a:t>
@@ -45423,6 +45602,7 @@
                   <a:srgbClr val="9AA1AB"/>
                 </a:solidFill>
                 <a:latin typeface="Amiri" pitchFamily="2" charset="-78"/>
+                <a:ea typeface="Amiri" pitchFamily="2" charset="-78"/>
                 <a:cs typeface="Amiri" pitchFamily="2" charset="-78"/>
               </a:rPr>
               <a:t>ب ت ث ن ي</a:t>
@@ -45524,6 +45704,7 @@
                   <a:srgbClr val="9AA1AB"/>
                 </a:solidFill>
                 <a:latin typeface="Amiri" pitchFamily="2" charset="-78"/>
+                <a:ea typeface="Amiri" pitchFamily="2" charset="-78"/>
                 <a:cs typeface="Amiri" pitchFamily="2" charset="-78"/>
               </a:rPr>
               <a:t>س ش ص ض</a:t>
@@ -45652,6 +45833,7 @@
                   <a:srgbClr val="1F2A37"/>
                 </a:solidFill>
                 <a:latin typeface="Amiri" pitchFamily="2" charset="-78"/>
+                <a:ea typeface="Amiri" pitchFamily="2" charset="-78"/>
                 <a:cs typeface="Amiri" pitchFamily="2" charset="-78"/>
               </a:rPr>
               <a:t>ا د ذ ر ز و</a:t>
@@ -45838,6 +46020,7 @@
                   <a:srgbClr val="1B3B6F"/>
                 </a:solidFill>
                 <a:latin typeface="Amiri" pitchFamily="2" charset="-78"/>
+                <a:ea typeface="Amiri" pitchFamily="2" charset="-78"/>
                 <a:cs typeface="Amiri" pitchFamily="2" charset="-78"/>
               </a:rPr>
               <a:t>إِمْلَاءٌ</a:t>
@@ -46367,6 +46550,7 @@
                   <a:srgbClr val="1B3B6F"/>
                 </a:solidFill>
                 <a:latin typeface="Amiri" pitchFamily="2" charset="-78"/>
+                <a:ea typeface="Amiri" pitchFamily="2" charset="-78"/>
                 <a:cs typeface="Amiri" pitchFamily="2" charset="-78"/>
               </a:rPr>
               <a:t>مَدْرَسَةٌ</a:t>
@@ -46500,6 +46684,7 @@
                   <a:srgbClr val="D4AF37"/>
                 </a:solidFill>
                 <a:latin typeface="Amiri" pitchFamily="2" charset="-78"/>
+                <a:ea typeface="Amiri" pitchFamily="2" charset="-78"/>
                 <a:cs typeface="Amiri" pitchFamily="2" charset="-78"/>
               </a:rPr>
               <a:t>م</a:t>
@@ -46820,6 +47005,7 @@
                   <a:srgbClr val="8A6D1E"/>
                 </a:solidFill>
                 <a:latin typeface="Amiri" pitchFamily="2" charset="-78"/>
+                <a:ea typeface="Amiri" pitchFamily="2" charset="-78"/>
                 <a:cs typeface="Amiri" pitchFamily="2" charset="-78"/>
               </a:rPr>
               <a:t>الحُرُوفُ الهِجَائِيَّةُ</a:t>
@@ -47100,6 +47286,7 @@
                   <a:srgbClr val="1B3B6F"/>
                 </a:solidFill>
                 <a:latin typeface="Amiri" pitchFamily="2" charset="-78"/>
+                <a:ea typeface="Amiri" pitchFamily="2" charset="-78"/>
                 <a:cs typeface="Amiri" pitchFamily="2" charset="-78"/>
               </a:rPr>
               <a:t>ا ب ت ث ج ح خ</a:t>
@@ -47138,6 +47325,7 @@
                   <a:srgbClr val="1B3B6F"/>
                 </a:solidFill>
                 <a:latin typeface="Amiri" pitchFamily="2" charset="-78"/>
+                <a:ea typeface="Amiri" pitchFamily="2" charset="-78"/>
                 <a:cs typeface="Amiri" pitchFamily="2" charset="-78"/>
               </a:rPr>
               <a:t>د ذ ر ز س ش ص</a:t>
@@ -47176,6 +47364,7 @@
                   <a:srgbClr val="1B3B6F"/>
                 </a:solidFill>
                 <a:latin typeface="Amiri" pitchFamily="2" charset="-78"/>
+                <a:ea typeface="Amiri" pitchFamily="2" charset="-78"/>
                 <a:cs typeface="Amiri" pitchFamily="2" charset="-78"/>
               </a:rPr>
               <a:t>ض ط ظ ع غ ف ق</a:t>
@@ -47214,6 +47403,7 @@
                   <a:srgbClr val="1B3B6F"/>
                 </a:solidFill>
                 <a:latin typeface="Amiri" pitchFamily="2" charset="-78"/>
+                <a:ea typeface="Amiri" pitchFamily="2" charset="-78"/>
                 <a:cs typeface="Amiri" pitchFamily="2" charset="-78"/>
               </a:rPr>
               <a:t>ك ل م ن ه و ي</a:t>
@@ -47330,6 +47520,7 @@
                   <a:srgbClr val="1B3B6F"/>
                 </a:solidFill>
                 <a:latin typeface="Amiri" pitchFamily="2" charset="-78"/>
+                <a:ea typeface="Amiri" pitchFamily="2" charset="-78"/>
                 <a:cs typeface="Amiri" pitchFamily="2" charset="-78"/>
               </a:rPr>
               <a:t>ء</a:t>
@@ -47356,6 +47547,7 @@
                   <a:srgbClr val="1B3B6F"/>
                 </a:solidFill>
                 <a:latin typeface="Amiri" pitchFamily="2" charset="-78"/>
+                <a:ea typeface="Amiri" pitchFamily="2" charset="-78"/>
                 <a:cs typeface="Amiri" pitchFamily="2" charset="-78"/>
               </a:rPr>
               <a:t>ة</a:t>
@@ -47502,6 +47694,7 @@
                   <a:srgbClr val="D4AF37"/>
                 </a:solidFill>
                 <a:latin typeface="Amiri" pitchFamily="2" charset="-78"/>
+                <a:ea typeface="Amiri" pitchFamily="2" charset="-78"/>
                 <a:cs typeface="Amiri" pitchFamily="2" charset="-78"/>
               </a:rPr>
               <a:t>م</a:t>
@@ -47822,6 +48015,7 @@
                   <a:srgbClr val="8A6D1E"/>
                 </a:solidFill>
                 <a:latin typeface="Amiri" pitchFamily="2" charset="-78"/>
+                <a:ea typeface="Amiri" pitchFamily="2" charset="-78"/>
                 <a:cs typeface="Amiri" pitchFamily="2" charset="-78"/>
               </a:rPr>
               <a:t>الأَهْدَافُ وَمَعَايِيرُ النَّجَاحِ</a:t>
@@ -47970,6 +48164,7 @@
                   <a:srgbClr val="8A6D1E"/>
                 </a:solidFill>
                 <a:latin typeface="Amiri" pitchFamily="2" charset="-78"/>
+                <a:ea typeface="Amiri" pitchFamily="2" charset="-78"/>
                 <a:cs typeface="Amiri" pitchFamily="2" charset="-78"/>
               </a:rPr>
               <a:t>سَتَتَعَلَّمُ اليَوْمَ</a:t>
@@ -49228,6 +49423,7 @@
                   <a:srgbClr val="D4AF37"/>
                 </a:solidFill>
                 <a:latin typeface="Amiri" pitchFamily="2" charset="-78"/>
+                <a:ea typeface="Amiri" pitchFamily="2" charset="-78"/>
                 <a:cs typeface="Amiri" pitchFamily="2" charset="-78"/>
               </a:rPr>
               <a:t>كَلِمَاتُ الدَّرْسِ</a:t>
@@ -49693,6 +49889,7 @@
                   <a:srgbClr val="1B3B6F"/>
                 </a:solidFill>
                 <a:latin typeface="Amiri" pitchFamily="2" charset="-78"/>
+                <a:ea typeface="Amiri" pitchFamily="2" charset="-78"/>
                 <a:cs typeface="Amiri" pitchFamily="2" charset="-78"/>
               </a:rPr>
               <a:t>خَطٌّ</a:t>
@@ -49726,11 +49923,12 @@
               <a:buNone/>
             </a:pPr>
             <a:r>
-              <a:rPr lang="ur-PK" altLang="en-US" sz="1400" b="1" dirty="0">
+              <a:rPr lang="ar-SA" altLang="en-US" sz="1400" b="1" dirty="0">
                 <a:solidFill>
                   <a:srgbClr val="2E8B57"/>
                 </a:solidFill>
                 <a:latin typeface="Amiri" pitchFamily="2" charset="-78"/>
+                <a:ea typeface="Amiri" pitchFamily="2" charset="-78"/>
                 <a:cs typeface="Amiri" pitchFamily="2" charset="-78"/>
               </a:rPr>
               <a:t>‎خط‎ </a:t>
@@ -49782,6 +49980,7 @@
                   <a:srgbClr val="1B3B6F"/>
                 </a:solidFill>
                 <a:latin typeface="Amiri" pitchFamily="2" charset="-78"/>
+                <a:ea typeface="Amiri" pitchFamily="2" charset="-78"/>
                 <a:cs typeface="Amiri" pitchFamily="2" charset="-78"/>
               </a:rPr>
               <a:t>إِمْلَاءٌ</a:t>
@@ -49815,11 +50014,12 @@
               <a:buNone/>
             </a:pPr>
             <a:r>
-              <a:rPr lang="ur-PK" altLang="en-US" sz="1400" b="1" dirty="0">
+              <a:rPr lang="ar-SA" altLang="en-US" sz="1400" b="1" dirty="0">
                 <a:solidFill>
                   <a:srgbClr val="2E8B57"/>
                 </a:solidFill>
                 <a:latin typeface="Amiri" pitchFamily="2" charset="-78"/>
+                <a:ea typeface="Amiri" pitchFamily="2" charset="-78"/>
                 <a:cs typeface="Amiri" pitchFamily="2" charset="-78"/>
               </a:rPr>
               <a:t>‎املا‎ </a:t>
@@ -49871,6 +50071,7 @@
                   <a:srgbClr val="1B3B6F"/>
                 </a:solidFill>
                 <a:latin typeface="Amiri" pitchFamily="2" charset="-78"/>
+                <a:ea typeface="Amiri" pitchFamily="2" charset="-78"/>
                 <a:cs typeface="Amiri" pitchFamily="2" charset="-78"/>
               </a:rPr>
               <a:t>سَطْرٌ</a:t>
@@ -49904,11 +50105,12 @@
               <a:buNone/>
             </a:pPr>
             <a:r>
-              <a:rPr lang="ur-PK" altLang="en-US" sz="1400" b="1" dirty="0">
+              <a:rPr lang="ar-SA" altLang="en-US" sz="1400" b="1" dirty="0">
                 <a:solidFill>
                   <a:srgbClr val="2E8B57"/>
                 </a:solidFill>
                 <a:latin typeface="Amiri" pitchFamily="2" charset="-78"/>
+                <a:ea typeface="Amiri" pitchFamily="2" charset="-78"/>
                 <a:cs typeface="Amiri" pitchFamily="2" charset="-78"/>
               </a:rPr>
               <a:t>‎سطر‎ </a:t>
@@ -49960,6 +50162,7 @@
                   <a:srgbClr val="1B3B6F"/>
                 </a:solidFill>
                 <a:latin typeface="Amiri" pitchFamily="2" charset="-78"/>
+                <a:ea typeface="Amiri" pitchFamily="2" charset="-78"/>
                 <a:cs typeface="Amiri" pitchFamily="2" charset="-78"/>
               </a:rPr>
               <a:t>نَسْخٌ</a:t>
@@ -49993,11 +50196,12 @@
               <a:buNone/>
             </a:pPr>
             <a:r>
-              <a:rPr lang="ur-PK" altLang="en-US" sz="1400" b="1" dirty="0">
+              <a:rPr lang="ar-SA" altLang="en-US" sz="1400" b="1" dirty="0">
                 <a:solidFill>
                   <a:srgbClr val="2E8B57"/>
                 </a:solidFill>
                 <a:latin typeface="Amiri" pitchFamily="2" charset="-78"/>
+                <a:ea typeface="Amiri" pitchFamily="2" charset="-78"/>
                 <a:cs typeface="Amiri" pitchFamily="2" charset="-78"/>
               </a:rPr>
               <a:t>‎نسخ‎ </a:t>
@@ -50049,6 +50253,7 @@
                   <a:srgbClr val="1B3B6F"/>
                 </a:solidFill>
                 <a:latin typeface="Amiri" pitchFamily="2" charset="-78"/>
+                <a:ea typeface="Amiri" pitchFamily="2" charset="-78"/>
                 <a:cs typeface="Amiri" pitchFamily="2" charset="-78"/>
               </a:rPr>
               <a:t>قَلَمٌ</a:t>
@@ -50082,11 +50287,12 @@
               <a:buNone/>
             </a:pPr>
             <a:r>
-              <a:rPr lang="ur-PK" altLang="en-US" sz="1400" b="1" dirty="0">
+              <a:rPr lang="ar-SA" altLang="en-US" sz="1400" b="1" dirty="0">
                 <a:solidFill>
                   <a:srgbClr val="2E8B57"/>
                 </a:solidFill>
                 <a:latin typeface="Amiri" pitchFamily="2" charset="-78"/>
+                <a:ea typeface="Amiri" pitchFamily="2" charset="-78"/>
                 <a:cs typeface="Amiri" pitchFamily="2" charset="-78"/>
               </a:rPr>
               <a:t>‎قلم‎ </a:t>
@@ -50233,6 +50439,7 @@
                   <a:srgbClr val="D4AF37"/>
                 </a:solidFill>
                 <a:latin typeface="Amiri" pitchFamily="2" charset="-78"/>
+                <a:ea typeface="Amiri" pitchFamily="2" charset="-78"/>
                 <a:cs typeface="Amiri" pitchFamily="2" charset="-78"/>
               </a:rPr>
               <a:t>م</a:t>
@@ -50553,6 +50760,7 @@
                   <a:srgbClr val="8A6D1E"/>
                 </a:solidFill>
                 <a:latin typeface="Amiri" pitchFamily="2" charset="-78"/>
+                <a:ea typeface="Amiri" pitchFamily="2" charset="-78"/>
                 <a:cs typeface="Amiri" pitchFamily="2" charset="-78"/>
               </a:rPr>
               <a:t>مَا الخَطُّ الوَاضِحُ؟</a:t>
@@ -50766,6 +50974,7 @@
                   <a:srgbClr val="1B3B6F"/>
                 </a:solidFill>
                 <a:latin typeface="Amiri" pitchFamily="2" charset="-78"/>
+                <a:ea typeface="Amiri" pitchFamily="2" charset="-78"/>
                 <a:cs typeface="Amiri" pitchFamily="2" charset="-78"/>
               </a:rPr>
               <a:t>بَيْتٌ</a:t>
@@ -51044,6 +51253,7 @@
                   <a:srgbClr val="1B3B6F"/>
                 </a:solidFill>
                 <a:latin typeface="Amiri" pitchFamily="2" charset="-78"/>
+                <a:ea typeface="Amiri" pitchFamily="2" charset="-78"/>
                 <a:cs typeface="Amiri" pitchFamily="2" charset="-78"/>
               </a:rPr>
               <a:t>جَدِيدٌ</a:t>
@@ -51095,6 +51305,7 @@
                   <a:srgbClr val="5A6472"/>
                 </a:solidFill>
                 <a:latin typeface="Amiri" pitchFamily="2" charset="-78"/>
+                <a:ea typeface="Amiri" pitchFamily="2" charset="-78"/>
                 <a:cs typeface="Amiri" pitchFamily="2" charset="-78"/>
               </a:rPr>
               <a:t>ا د ذ ر ز و</a:t>
@@ -51186,6 +51397,7 @@
                   <a:srgbClr val="1F2A37"/>
                 </a:solidFill>
                 <a:latin typeface="Amiri" pitchFamily="2" charset="-78"/>
+                <a:ea typeface="Amiri" pitchFamily="2" charset="-78"/>
                 <a:cs typeface="Amiri" pitchFamily="2" charset="-78"/>
               </a:rPr>
               <a:t>د</a:t>
@@ -51212,6 +51424,7 @@
                   <a:srgbClr val="1F2A37"/>
                 </a:solidFill>
                 <a:latin typeface="Amiri" pitchFamily="2" charset="-78"/>
+                <a:ea typeface="Amiri" pitchFamily="2" charset="-78"/>
                 <a:cs typeface="Amiri" pitchFamily="2" charset="-78"/>
               </a:rPr>
               <a:t>جَدِيدٌ</a:t>
@@ -51400,6 +51613,7 @@
                   <a:srgbClr val="1B3B6F"/>
                 </a:solidFill>
                 <a:latin typeface="Amiri" pitchFamily="2" charset="-78"/>
+                <a:ea typeface="Amiri" pitchFamily="2" charset="-78"/>
                 <a:cs typeface="Amiri" pitchFamily="2" charset="-78"/>
               </a:rPr>
               <a:t>قَلَمٌ جَدِيدٌ</a:t>
@@ -51601,13 +51815,9 @@
     <a:fontScheme name="Office">
       <a:majorFont>
         <a:latin typeface="Calibri Light" panose="020F0302020204030204"/>
-        <a:ea typeface=""/>
-        <a:cs typeface=""/>
-        <a:font script="Jpan" typeface="游ゴシック Light"/>
-        <a:font script="Hang" typeface="맑은 고딕"/>
-        <a:font script="Hans" typeface="等线 Light"/>
-        <a:font script="Hant" typeface="新細明體"/>
-        <a:font script="Arab" typeface="Times New Roman"/>
+        <a:ea typeface="Amiri" pitchFamily="2" charset="-78"/>
+        <a:cs typeface="Amiri" pitchFamily="2" charset="-78"/>
+        <a:font script="Arab" typeface="Amiri"/>
         <a:font script="Hebr" typeface="Times New Roman"/>
         <a:font script="Thai" typeface="Angsana New"/>
         <a:font script="Ethi" typeface="Nyala"/>
@@ -51653,13 +51863,9 @@
       </a:majorFont>
       <a:minorFont>
         <a:latin typeface="Calibri" panose="020F0502020204030204"/>
-        <a:ea typeface=""/>
-        <a:cs typeface=""/>
-        <a:font script="Jpan" typeface="游ゴシック"/>
-        <a:font script="Hang" typeface="맑은 고딕"/>
-        <a:font script="Hans" typeface="等线"/>
-        <a:font script="Hant" typeface="新細明體"/>
-        <a:font script="Arab" typeface="Arial"/>
+        <a:ea typeface="Amiri" pitchFamily="2" charset="-78"/>
+        <a:cs typeface="Amiri" pitchFamily="2" charset="-78"/>
+        <a:font script="Arab" typeface="Amiri"/>
         <a:font script="Hebr" typeface="Arial"/>
         <a:font script="Thai" typeface="Cordia New"/>
         <a:font script="Ethi" typeface="Nyala"/>

--- a/Foundation_F1/F1-L09_Handwriting_Dictation.pptx
+++ b/Foundation_F1/F1-L09_Handwriting_Dictation.pptx
@@ -37101,7 +37101,7 @@
                 <a:solidFill>
                   <a:srgbClr val="5A6472"/>
                 </a:solidFill>
-                <a:latin typeface="Calibri" pitchFamily="34" charset="0"/>
+                <a:latin typeface="Amiri" pitchFamily="2" charset="-78"/>
                 <a:ea typeface="Amiri" pitchFamily="2" charset="-78"/>
                 <a:cs typeface="Amiri" pitchFamily="2" charset="-78"/>
               </a:rPr>
@@ -37192,7 +37192,7 @@
                 <a:solidFill>
                   <a:srgbClr val="5A6472"/>
                 </a:solidFill>
-                <a:latin typeface="Calibri" pitchFamily="34" charset="0"/>
+                <a:latin typeface="Amiri" pitchFamily="2" charset="-78"/>
                 <a:ea typeface="Amiri" pitchFamily="2" charset="-78"/>
                 <a:cs typeface="Amiri" pitchFamily="2" charset="-78"/>
               </a:rPr>
@@ -37283,7 +37283,7 @@
                 <a:solidFill>
                   <a:srgbClr val="5A6472"/>
                 </a:solidFill>
-                <a:latin typeface="Calibri" pitchFamily="34" charset="0"/>
+                <a:latin typeface="Amiri" pitchFamily="2" charset="-78"/>
                 <a:ea typeface="Amiri" pitchFamily="2" charset="-78"/>
                 <a:cs typeface="Amiri" pitchFamily="2" charset="-78"/>
               </a:rPr>
@@ -37374,7 +37374,7 @@
                 <a:solidFill>
                   <a:srgbClr val="5A6472"/>
                 </a:solidFill>
-                <a:latin typeface="Calibri" pitchFamily="34" charset="0"/>
+                <a:latin typeface="Amiri" pitchFamily="2" charset="-78"/>
                 <a:ea typeface="Amiri" pitchFamily="2" charset="-78"/>
                 <a:cs typeface="Amiri" pitchFamily="2" charset="-78"/>
               </a:rPr>
@@ -37465,7 +37465,7 @@
                 <a:solidFill>
                   <a:srgbClr val="5A6472"/>
                 </a:solidFill>
-                <a:latin typeface="Calibri" pitchFamily="34" charset="0"/>
+                <a:latin typeface="Amiri" pitchFamily="2" charset="-78"/>
                 <a:ea typeface="Amiri" pitchFamily="2" charset="-78"/>
                 <a:cs typeface="Amiri" pitchFamily="2" charset="-78"/>
               </a:rPr>
